--- a/slides/0_introduction.pptx
+++ b/slides/0_introduction.pptx
@@ -488,7 +488,7 @@
           <a:p>
             <a:fld id="{506E0FD1-891F-4B1E-916D-E9B585160BB8}" type="datetimeFigureOut">
               <a:rPr lang="en-GB" smtClean="0"/>
-              <a:t>23/02/2026</a:t>
+              <a:t>01/03/2026</a:t>
             </a:fld>
             <a:endParaRPr lang="en-GB"/>
           </a:p>
@@ -905,7 +905,7 @@
           <a:p>
             <a:fld id="{D68C3F22-27B2-44E3-9C5F-D08126455F6F}" type="datetime1">
               <a:rPr lang="en-GB" smtClean="0"/>
-              <a:t>23/02/2026</a:t>
+              <a:t>01/03/2026</a:t>
             </a:fld>
             <a:endParaRPr lang="en-GB"/>
           </a:p>
@@ -1105,7 +1105,7 @@
           <a:p>
             <a:fld id="{1CD03846-7BF6-4FB6-A921-FF3379ADBD4C}" type="datetime1">
               <a:rPr lang="en-GB" smtClean="0"/>
-              <a:t>23/02/2026</a:t>
+              <a:t>01/03/2026</a:t>
             </a:fld>
             <a:endParaRPr lang="en-GB"/>
           </a:p>
@@ -1315,7 +1315,7 @@
           <a:p>
             <a:fld id="{99E1B91A-3FD0-4144-9C84-63E9688ED2FE}" type="datetime1">
               <a:rPr lang="en-GB" smtClean="0"/>
-              <a:t>23/02/2026</a:t>
+              <a:t>01/03/2026</a:t>
             </a:fld>
             <a:endParaRPr lang="en-GB"/>
           </a:p>
@@ -1515,7 +1515,7 @@
           <a:p>
             <a:fld id="{5295ED7B-FEAD-4734-819F-93EF4B0EA908}" type="datetime1">
               <a:rPr lang="en-GB" smtClean="0"/>
-              <a:t>23/02/2026</a:t>
+              <a:t>01/03/2026</a:t>
             </a:fld>
             <a:endParaRPr lang="en-GB"/>
           </a:p>
@@ -1791,7 +1791,7 @@
           <a:p>
             <a:fld id="{D2D5D4B4-C926-4B45-8815-1ED8911179A2}" type="datetime1">
               <a:rPr lang="en-GB" smtClean="0"/>
-              <a:t>23/02/2026</a:t>
+              <a:t>01/03/2026</a:t>
             </a:fld>
             <a:endParaRPr lang="en-GB"/>
           </a:p>
@@ -2059,7 +2059,7 @@
           <a:p>
             <a:fld id="{B4C5210A-0E37-4935-93AF-69F21A5F712F}" type="datetime1">
               <a:rPr lang="en-GB" smtClean="0"/>
-              <a:t>23/02/2026</a:t>
+              <a:t>01/03/2026</a:t>
             </a:fld>
             <a:endParaRPr lang="en-GB"/>
           </a:p>
@@ -2474,7 +2474,7 @@
           <a:p>
             <a:fld id="{3D3A6B2F-436C-4691-80E8-9C890E000E9D}" type="datetime1">
               <a:rPr lang="en-GB" smtClean="0"/>
-              <a:t>23/02/2026</a:t>
+              <a:t>01/03/2026</a:t>
             </a:fld>
             <a:endParaRPr lang="en-GB"/>
           </a:p>
@@ -2616,7 +2616,7 @@
           <a:p>
             <a:fld id="{84385F4C-D74B-496F-8D21-97E3549C783B}" type="datetime1">
               <a:rPr lang="en-GB" smtClean="0"/>
-              <a:t>23/02/2026</a:t>
+              <a:t>01/03/2026</a:t>
             </a:fld>
             <a:endParaRPr lang="en-GB"/>
           </a:p>
@@ -2729,7 +2729,7 @@
           <a:p>
             <a:fld id="{0CBDCB32-C241-4703-A832-4EB47BD54E83}" type="datetime1">
               <a:rPr lang="en-GB" smtClean="0"/>
-              <a:t>23/02/2026</a:t>
+              <a:t>01/03/2026</a:t>
             </a:fld>
             <a:endParaRPr lang="en-GB"/>
           </a:p>
@@ -3042,7 +3042,7 @@
           <a:p>
             <a:fld id="{85C150FF-BE95-4D25-A16A-E368A81CBF24}" type="datetime1">
               <a:rPr lang="en-GB" smtClean="0"/>
-              <a:t>23/02/2026</a:t>
+              <a:t>01/03/2026</a:t>
             </a:fld>
             <a:endParaRPr lang="en-GB"/>
           </a:p>
@@ -3331,7 +3331,7 @@
           <a:p>
             <a:fld id="{F3C5DB4B-B349-43C9-A424-BADA723AD9F1}" type="datetime1">
               <a:rPr lang="en-GB" smtClean="0"/>
-              <a:t>23/02/2026</a:t>
+              <a:t>01/03/2026</a:t>
             </a:fld>
             <a:endParaRPr lang="en-GB"/>
           </a:p>
@@ -3574,7 +3574,7 @@
           <a:p>
             <a:fld id="{12632426-0A0C-405F-A3D0-2D11AA44702A}" type="datetime1">
               <a:rPr lang="en-GB" smtClean="0"/>
-              <a:t>23/02/2026</a:t>
+              <a:t>01/03/2026</a:t>
             </a:fld>
             <a:endParaRPr lang="en-GB"/>
           </a:p>
@@ -4290,11 +4290,11 @@
             </a:r>
             <a:r>
               <a:rPr lang="de-DE" sz="1500" dirty="0"/>
-              <a:t>Linear Models, K-</a:t>
+              <a:t>Linear Models, </a:t>
             </a:r>
             <a:r>
               <a:rPr lang="de-DE" sz="1500" dirty="0" err="1"/>
-              <a:t>Nearest</a:t>
+              <a:t>k-Nearest</a:t>
             </a:r>
             <a:r>
               <a:rPr lang="de-DE" sz="1500" dirty="0"/>
@@ -8039,41 +8039,6 @@
           </p:style>
         </p:cxnSp>
       </p:grpSp>
-      <p:sp>
-        <p:nvSpPr>
-          <p:cNvPr id="43" name="TextBox 42">
-            <a:extLst>
-              <a:ext uri="{FF2B5EF4-FFF2-40B4-BE49-F238E27FC236}">
-                <a16:creationId xmlns:a16="http://schemas.microsoft.com/office/drawing/2014/main" id="{54C13FEC-ECD5-AC00-B8E2-8D8BC7A67351}"/>
-              </a:ext>
-            </a:extLst>
-          </p:cNvPr>
-          <p:cNvSpPr txBox="1"/>
-          <p:nvPr/>
-        </p:nvSpPr>
-        <p:spPr>
-          <a:xfrm>
-            <a:off x="5289232" y="6125944"/>
-            <a:ext cx="4831367" cy="646331"/>
-          </a:xfrm>
-          <a:prstGeom prst="rect">
-            <a:avLst/>
-          </a:prstGeom>
-          <a:noFill/>
-        </p:spPr>
-        <p:txBody>
-          <a:bodyPr wrap="square" rtlCol="0">
-            <a:spAutoFit/>
-          </a:bodyPr>
-          <a:lstStyle/>
-          <a:p>
-            <a:r>
-              <a:rPr lang="en-GB" dirty="0"/>
-              <a:t>unsupervised and reinforcement learning can both be cast as supervised-learning setup</a:t>
-            </a:r>
-          </a:p>
-        </p:txBody>
-      </p:sp>
     </p:spTree>
     <p:extLst>
       <p:ext uri="{BB962C8B-B14F-4D97-AF65-F5344CB8AC3E}">
